--- a/builder/assets/reference-pages/issue-tree.pptx
+++ b/builder/assets/reference-pages/issue-tree.pptx
@@ -1259,7 +1259,7 @@
                   <a:srgbClr val="172033"/>
                 </a:solidFill>
               </a:rPr>
-              <a:t>人效下滑的根因集中在岗位结构与排班执行</a:t>
+              <a:t>The root cause of the decline in human efficiency is concentrated on job structure and shift execution</a:t>
             </a:r>
           </a:p>
         </p:txBody>
@@ -1315,7 +1315,7 @@
                   <a:srgbClr val="FFFFFF"/>
                 </a:solidFill>
               </a:rPr>
-              <a:t>人效为何持续下滑</a:t>
+              <a:t>Why human efficiency continues to decline</a:t>
             </a:r>
           </a:p>
         </p:txBody>
@@ -1371,7 +1371,7 @@
                   <a:srgbClr val="172033"/>
                 </a:solidFill>
               </a:rPr>
-              <a:t>结构性因素</a:t>
+              <a:t>structural factors</a:t>
             </a:r>
           </a:p>
         </p:txBody>
@@ -1427,7 +1427,7 @@
                   <a:srgbClr val="172033"/>
                 </a:solidFill>
               </a:rPr>
-              <a:t>运营性因素</a:t>
+              <a:t>operational factors</a:t>
             </a:r>
           </a:p>
         </p:txBody>
@@ -1483,7 +1483,7 @@
                   <a:srgbClr val="172033"/>
                 </a:solidFill>
               </a:rPr>
-              <a:t>关键岗位空缺</a:t>
+              <a:t>Key positions vacant</a:t>
             </a:r>
           </a:p>
         </p:txBody>
@@ -1539,7 +1539,7 @@
                   <a:srgbClr val="172033"/>
                 </a:solidFill>
               </a:rPr>
-              <a:t>管理层级过多</a:t>
+              <a:t>Too many levels of management</a:t>
             </a:r>
           </a:p>
         </p:txBody>
@@ -1595,7 +1595,7 @@
                   <a:srgbClr val="172033"/>
                 </a:solidFill>
               </a:rPr>
-              <a:t>高峰排班不足</a:t>
+              <a:t>Insufficient peak shifts</a:t>
             </a:r>
           </a:p>
         </p:txBody>
@@ -1651,7 +1651,7 @@
                   <a:srgbClr val="697386"/>
                 </a:solidFill>
               </a:rPr>
-              <a:t>低峰冗余</a:t>
+              <a:t>low peak redundancy</a:t>
             </a:r>
           </a:p>
         </p:txBody>
@@ -1786,7 +1786,7 @@
                   <a:srgbClr val="172033"/>
                 </a:solidFill>
               </a:rPr>
-              <a:t>先补齐关键岗位</a:t>
+              <a:t>Fill key positions first</a:t>
             </a:r>
           </a:p>
         </p:txBody>
@@ -1836,7 +1836,7 @@
                   <a:srgbClr val="172033"/>
                 </a:solidFill>
               </a:rPr>
-              <a:t>再调整高峰排班</a:t>
+              <a:t>Adjust peak shift schedule again</a:t>
             </a:r>
           </a:p>
         </p:txBody>
